--- a/SLOPE_progress_temp.pptx
+++ b/SLOPE_progress_temp.pptx
@@ -7053,7 +7053,7 @@
         <p:spPr>
           <a:xfrm>
             <a:off x="5335471" y="39605"/>
-            <a:ext cx="5939609" cy="2062103"/>
+            <a:ext cx="5939609" cy="2339102"/>
           </a:xfrm>
           <a:prstGeom prst="rect">
             <a:avLst/>
@@ -7146,8 +7146,18 @@
             </a:pPr>
             <a:r>
               <a:rPr lang="en-US" dirty="0"/>
-              <a:t>Double check defaults for all model hp settings</a:t>
-            </a:r>
+              <a:t>Double check defaults for all model </a:t>
+            </a:r>
+            <a:r>
+              <a:rPr lang="en-US"/>
+              <a:t>hp settings</a:t>
+            </a:r>
+          </a:p>
+          <a:p>
+            <a:pPr marL="285750" indent="-285750">
+              <a:buFont typeface="Arial" panose="020B0604020202020204" pitchFamily="34" charset="0"/>
+              <a:buChar char="•"/>
+            </a:pPr>
             <a:endParaRPr lang="en-US" dirty="0">
               <a:effectLst/>
             </a:endParaRPr>

--- a/SLOPE_progress_temp.pptx
+++ b/SLOPE_progress_temp.pptx
@@ -266,7 +266,7 @@
           <a:p>
             <a:fld id="{D8E254F4-E692-8547-ACD7-35D341663ABD}" type="datetimeFigureOut">
               <a:rPr lang="en-US" smtClean="0"/>
-              <a:t>2/27/24</a:t>
+              <a:t>3/13/24</a:t>
             </a:fld>
             <a:endParaRPr lang="en-US"/>
           </a:p>
@@ -464,7 +464,7 @@
           <a:p>
             <a:fld id="{D8E254F4-E692-8547-ACD7-35D341663ABD}" type="datetimeFigureOut">
               <a:rPr lang="en-US" smtClean="0"/>
-              <a:t>2/27/24</a:t>
+              <a:t>3/13/24</a:t>
             </a:fld>
             <a:endParaRPr lang="en-US"/>
           </a:p>
@@ -672,7 +672,7 @@
           <a:p>
             <a:fld id="{D8E254F4-E692-8547-ACD7-35D341663ABD}" type="datetimeFigureOut">
               <a:rPr lang="en-US" smtClean="0"/>
-              <a:t>2/27/24</a:t>
+              <a:t>3/13/24</a:t>
             </a:fld>
             <a:endParaRPr lang="en-US"/>
           </a:p>
@@ -870,7 +870,7 @@
           <a:p>
             <a:fld id="{D8E254F4-E692-8547-ACD7-35D341663ABD}" type="datetimeFigureOut">
               <a:rPr lang="en-US" smtClean="0"/>
-              <a:t>2/27/24</a:t>
+              <a:t>3/13/24</a:t>
             </a:fld>
             <a:endParaRPr lang="en-US"/>
           </a:p>
@@ -1145,7 +1145,7 @@
           <a:p>
             <a:fld id="{D8E254F4-E692-8547-ACD7-35D341663ABD}" type="datetimeFigureOut">
               <a:rPr lang="en-US" smtClean="0"/>
-              <a:t>2/27/24</a:t>
+              <a:t>3/13/24</a:t>
             </a:fld>
             <a:endParaRPr lang="en-US"/>
           </a:p>
@@ -1410,7 +1410,7 @@
           <a:p>
             <a:fld id="{D8E254F4-E692-8547-ACD7-35D341663ABD}" type="datetimeFigureOut">
               <a:rPr lang="en-US" smtClean="0"/>
-              <a:t>2/27/24</a:t>
+              <a:t>3/13/24</a:t>
             </a:fld>
             <a:endParaRPr lang="en-US"/>
           </a:p>
@@ -1822,7 +1822,7 @@
           <a:p>
             <a:fld id="{D8E254F4-E692-8547-ACD7-35D341663ABD}" type="datetimeFigureOut">
               <a:rPr lang="en-US" smtClean="0"/>
-              <a:t>2/27/24</a:t>
+              <a:t>3/13/24</a:t>
             </a:fld>
             <a:endParaRPr lang="en-US"/>
           </a:p>
@@ -1963,7 +1963,7 @@
           <a:p>
             <a:fld id="{D8E254F4-E692-8547-ACD7-35D341663ABD}" type="datetimeFigureOut">
               <a:rPr lang="en-US" smtClean="0"/>
-              <a:t>2/27/24</a:t>
+              <a:t>3/13/24</a:t>
             </a:fld>
             <a:endParaRPr lang="en-US"/>
           </a:p>
@@ -2076,7 +2076,7 @@
           <a:p>
             <a:fld id="{D8E254F4-E692-8547-ACD7-35D341663ABD}" type="datetimeFigureOut">
               <a:rPr lang="en-US" smtClean="0"/>
-              <a:t>2/27/24</a:t>
+              <a:t>3/13/24</a:t>
             </a:fld>
             <a:endParaRPr lang="en-US"/>
           </a:p>
@@ -2387,7 +2387,7 @@
           <a:p>
             <a:fld id="{D8E254F4-E692-8547-ACD7-35D341663ABD}" type="datetimeFigureOut">
               <a:rPr lang="en-US" smtClean="0"/>
-              <a:t>2/27/24</a:t>
+              <a:t>3/13/24</a:t>
             </a:fld>
             <a:endParaRPr lang="en-US"/>
           </a:p>
@@ -2675,7 +2675,7 @@
           <a:p>
             <a:fld id="{D8E254F4-E692-8547-ACD7-35D341663ABD}" type="datetimeFigureOut">
               <a:rPr lang="en-US" smtClean="0"/>
-              <a:t>2/27/24</a:t>
+              <a:t>3/13/24</a:t>
             </a:fld>
             <a:endParaRPr lang="en-US"/>
           </a:p>
@@ -2916,7 +2916,7 @@
           <a:p>
             <a:fld id="{D8E254F4-E692-8547-ACD7-35D341663ABD}" type="datetimeFigureOut">
               <a:rPr lang="en-US" smtClean="0"/>
-              <a:t>2/27/24</a:t>
+              <a:t>3/13/24</a:t>
             </a:fld>
             <a:endParaRPr lang="en-US"/>
           </a:p>
@@ -3591,28 +3591,28 @@
           <a:lstStyle/>
           <a:p>
             <a:r>
-              <a:rPr lang="en-US" dirty="0"/>
+              <a:rPr lang="en-US" strike="sngStrike" dirty="0"/>
               <a:t>More subfunctions for better task isolation/access </a:t>
             </a:r>
           </a:p>
           <a:p>
             <a:pPr lvl="1"/>
             <a:r>
-              <a:rPr lang="en-US" dirty="0"/>
+              <a:rPr lang="en-US" strike="sngStrike" dirty="0"/>
               <a:t>e.g., can’t call tuning results </a:t>
             </a:r>
             <a:r>
-              <a:rPr lang="en-US" dirty="0" err="1"/>
+              <a:rPr lang="en-US" strike="sngStrike" dirty="0" err="1"/>
               <a:t>rn</a:t>
             </a:r>
             <a:r>
-              <a:rPr lang="en-US" dirty="0"/>
+              <a:rPr lang="en-US" strike="sngStrike" dirty="0"/>
               <a:t> from supervised</a:t>
             </a:r>
           </a:p>
           <a:p>
             <a:r>
-              <a:rPr lang="en-US" dirty="0"/>
+              <a:rPr lang="en-US" strike="sngStrike" dirty="0"/>
               <a:t>Allow specification of folds to happen outside the model training functions (we should be able to tell the users ahead of time what samples are in which fold)</a:t>
             </a:r>
           </a:p>
@@ -3624,22 +3624,22 @@
           </a:p>
           <a:p>
             <a:r>
-              <a:rPr lang="en-US" dirty="0"/>
+              <a:rPr lang="en-US" strike="sngStrike" dirty="0"/>
               <a:t>Plots break if </a:t>
             </a:r>
             <a:r>
-              <a:rPr lang="en-US" dirty="0" err="1"/>
+              <a:rPr lang="en-US" strike="sngStrike" dirty="0" err="1"/>
               <a:t>nTest</a:t>
             </a:r>
             <a:r>
-              <a:rPr lang="en-US" dirty="0"/>
+              <a:rPr lang="en-US" strike="sngStrike" dirty="0"/>
               <a:t> = 0 (no holdout)</a:t>
             </a:r>
           </a:p>
           <a:p>
             <a:pPr lvl="1"/>
             <a:r>
-              <a:rPr lang="en-US" dirty="0"/>
+              <a:rPr lang="en-US" strike="sngStrike" dirty="0"/>
               <a:t>Appears to be fixed, double check if new results are from means across cross validation?  </a:t>
             </a:r>
           </a:p>
@@ -3659,7 +3659,7 @@
           </a:p>
           <a:p>
             <a:r>
-              <a:rPr lang="en-US" dirty="0"/>
+              <a:rPr lang="en-US" strike="sngStrike" dirty="0"/>
               <a:t>Add argument for seed for consistent fun</a:t>
             </a:r>
           </a:p>
@@ -7179,7 +7179,7 @@
         <p:spPr>
           <a:xfrm>
             <a:off x="6443530" y="2682242"/>
-            <a:ext cx="5529127" cy="4001095"/>
+            <a:ext cx="5529127" cy="3724096"/>
           </a:xfrm>
           <a:prstGeom prst="rect">
             <a:avLst/>
@@ -7195,16 +7195,6 @@
             <a:r>
               <a:rPr lang="en-US" sz="2000" dirty="0"/>
               <a:t>Feature additions</a:t>
-            </a:r>
-          </a:p>
-          <a:p>
-            <a:pPr marL="285750" indent="-285750">
-              <a:buFont typeface="Arial" panose="020B0604020202020204" pitchFamily="34" charset="0"/>
-              <a:buChar char="•"/>
-            </a:pPr>
-            <a:r>
-              <a:rPr lang="en-US" dirty="0"/>
-              <a:t>Parameter optimization plots</a:t>
             </a:r>
           </a:p>
           <a:p>
@@ -7472,7 +7462,7 @@
         <p:spPr/>
         <p:txBody>
           <a:bodyPr>
-            <a:normAutofit fontScale="92500" lnSpcReduction="10000"/>
+            <a:normAutofit fontScale="92500" lnSpcReduction="20000"/>
           </a:bodyPr>
           <a:lstStyle/>
           <a:p>
@@ -7582,29 +7572,29 @@
           </a:p>
           <a:p>
             <a:r>
-              <a:rPr lang="en-US" dirty="0"/>
+              <a:rPr lang="en-US" strike="sngStrike" dirty="0"/>
               <a:t>Documentation</a:t>
             </a:r>
           </a:p>
           <a:p>
             <a:pPr lvl="1"/>
             <a:r>
-              <a:rPr lang="en-US" dirty="0"/>
+              <a:rPr lang="en-US" strike="sngStrike" dirty="0"/>
               <a:t>Do stuff</a:t>
             </a:r>
           </a:p>
           <a:p>
             <a:pPr lvl="1"/>
             <a:r>
-              <a:rPr lang="en-US" dirty="0"/>
+              <a:rPr lang="en-US" strike="sngStrike" dirty="0"/>
               <a:t>Chat with Clayton on app </a:t>
             </a:r>
             <a:r>
-              <a:rPr lang="en-US" dirty="0" err="1"/>
+              <a:rPr lang="en-US" strike="sngStrike" dirty="0" err="1"/>
               <a:t>runthrough</a:t>
             </a:r>
             <a:r>
-              <a:rPr lang="en-US" dirty="0"/>
+              <a:rPr lang="en-US" strike="sngStrike" dirty="0"/>
               <a:t> + screenshots</a:t>
             </a:r>
           </a:p>
@@ -7612,6 +7602,20 @@
             <a:r>
               <a:rPr lang="en-US" dirty="0"/>
               <a:t>Mysterious disconnect error</a:t>
+            </a:r>
+          </a:p>
+          <a:p>
+            <a:r>
+              <a:rPr lang="en-US" strike="sngStrike" dirty="0"/>
+              <a:t>Add datatypes to </a:t>
+            </a:r>
+            <a:r>
+              <a:rPr lang="en-US" strike="sngStrike" dirty="0" err="1"/>
+              <a:t>pmart</a:t>
+            </a:r>
+            <a:r>
+              <a:rPr lang="en-US" strike="sngStrike" dirty="0"/>
+              <a:t> and slope apps</a:t>
             </a:r>
           </a:p>
         </p:txBody>
